--- a/docs/산출물_20260911/06_ECS_화면설계서.pptx
+++ b/docs/산출물_20260911/06_ECS_화면설계서.pptx
@@ -7193,7 +7193,7 @@
                           </a:solidFill>
                           <a:latin typeface="맑은 고딕"/>
                         </a:rPr>
-                        <a:t>[INI 열기] 버튼 숨김(목차에 없던 화면), 범례 글자를 칸 크기에 맞춤, RTV 가 103 제품 입고대에 한 칸 덜 온 것으로 보이던 배치 수정, 캡처 갱신</a:t>
+                        <a:t>[INI 열기] 버튼 숨김(목차에 없던 화면), 범례 글자를 칸 크기에 맞춤, RTV 가 103 제품 입고대에 한 칸 덜 온 것으로 보이던 배치 수정, 캡처 갱신, 설비 대화상자(CV/SC/RTV)의 [확대] 버튼 숨김</a:t>
                       </a:r>
                     </a:p>
                   </a:txBody>
@@ -8764,7 +8764,7 @@
           <p:nvPr/>
         </p:nvPicPr>
         <p:blipFill>
-          <a:blip r:embed="rId2"/>
+          <a:blip r:embed="rId3"/>
           <a:stretch>
             <a:fillRect/>
           </a:stretch>
@@ -8772,7 +8772,7 @@
         <p:spPr>
           <a:xfrm>
             <a:off x="2486856" y="1600646"/>
-            <a:ext cx="3804524" cy="4205347"/>
+            <a:ext cx="3804524" cy="4205346"/>
           </a:xfrm>
           <a:prstGeom prst="rect">
             <a:avLst/>
@@ -8885,16 +8885,223 @@
           </a:p>
         </p:txBody>
       </p:sp>
+      <p:sp>
+        <p:nvSpPr>
+          <p:cNvPr id="5" name="TextBox 4"/>
+          <p:cNvSpPr txBox="1"/>
+          <p:nvPr/>
+        </p:nvSpPr>
+        <p:spPr>
+          <a:xfrm>
+            <a:off x="8503920" y="1188720"/>
+            <a:ext cx="3291840" cy="5029200"/>
+          </a:xfrm>
+          <a:prstGeom prst="rect">
+            <a:avLst/>
+          </a:prstGeom>
+          <a:noFill/>
+        </p:spPr>
+        <p:txBody>
+          <a:bodyPr wrap="square" lIns="45720" rIns="45720" anchor="t">
+            <a:spAutoFit/>
+          </a:bodyPr>
+          <a:lstStyle/>
+          <a:p>
+            <a:pPr algn="l"/>
+            <a:r>
+              <a:rPr sz="1300" b="1">
+                <a:solidFill>
+                  <a:srgbClr val="000000"/>
+                </a:solidFill>
+                <a:latin typeface="맑은 고딕"/>
+              </a:rPr>
+              <a:t>■ 메뉴 Path</a:t>
+            </a:r>
+          </a:p>
+          <a:p>
+            <a:pPr algn="l"/>
+            <a:r>
+              <a:rPr sz="1100" b="0">
+                <a:solidFill>
+                  <a:srgbClr val="000000"/>
+                </a:solidFill>
+                <a:latin typeface="맑은 고딕"/>
+              </a:rPr>
+              <a:t>메인 화면에서 크레인(랙 열 번호) 클릭</a:t>
+            </a:r>
+          </a:p>
+          <a:p>
+            <a:pPr algn="l"/>
+            <a:endParaRPr sz="1100" b="0">
+              <a:solidFill>
+                <a:srgbClr val="595959"/>
+              </a:solidFill>
+              <a:latin typeface="맑은 고딕"/>
+            </a:endParaRPr>
+          </a:p>
+          <a:p>
+            <a:pPr algn="l"/>
+            <a:r>
+              <a:rPr sz="1300" b="1">
+                <a:solidFill>
+                  <a:srgbClr val="000000"/>
+                </a:solidFill>
+                <a:latin typeface="맑은 고딕"/>
+              </a:rPr>
+              <a:t>■ 프로그램 개요</a:t>
+            </a:r>
+          </a:p>
+          <a:p>
+            <a:pPr algn="l"/>
+            <a:r>
+              <a:rPr sz="1100" b="0">
+                <a:solidFill>
+                  <a:srgbClr val="000000"/>
+                </a:solidFill>
+                <a:latin typeface="맑은 고딕"/>
+              </a:rPr>
+              <a:t>크레인 상태·차상 화물·좌표·에러와 작업 상태를 본다. 명령은 지시 재전송 / 삭제 / 강제완료 / 수동지시.</a:t>
+            </a:r>
+          </a:p>
+          <a:p>
+            <a:pPr algn="l"/>
+            <a:endParaRPr sz="1100" b="0">
+              <a:solidFill>
+                <a:srgbClr val="595959"/>
+              </a:solidFill>
+              <a:latin typeface="맑은 고딕"/>
+            </a:endParaRPr>
+          </a:p>
+          <a:p>
+            <a:pPr algn="l"/>
+            <a:r>
+              <a:rPr sz="1300" b="1">
+                <a:solidFill>
+                  <a:srgbClr val="000000"/>
+                </a:solidFill>
+                <a:latin typeface="맑은 고딕"/>
+              </a:rPr>
+              <a:t>■ 특기사항</a:t>
+            </a:r>
+          </a:p>
+          <a:p>
+            <a:pPr algn="l"/>
+            <a:r>
+              <a:rPr sz="1000" b="0">
+                <a:solidFill>
+                  <a:srgbClr val="000000"/>
+                </a:solidFill>
+                <a:latin typeface="맑은 고딕"/>
+              </a:rPr>
+              <a:t>· 작업상태는 두 열(왼쪽 작업번호·구분·상태·적재용기·제품정보, 오른쪽 출발지·출발위치·도착지·도착위치).</a:t>
+            </a:r>
+          </a:p>
+          <a:p>
+            <a:pPr algn="l"/>
+            <a:r>
+              <a:rPr sz="1000" b="0">
+                <a:solidFill>
+                  <a:srgbClr val="000000"/>
+                </a:solidFill>
+                <a:latin typeface="맑은 고딕"/>
+              </a:rPr>
+              <a:t>· [지시 삭제] 는 설비에 남은 지시(OD)와 요청 플래그를 함께 비운다.</a:t>
+            </a:r>
+          </a:p>
+          <a:p>
+            <a:pPr algn="l"/>
+            <a:r>
+              <a:rPr sz="1000" b="0">
+                <a:solidFill>
+                  <a:srgbClr val="000000"/>
+                </a:solidFill>
+                <a:latin typeface="맑은 고딕"/>
+              </a:rPr>
+              <a:t>· [수동지시] 는 MANUAL &gt; 크레인 창을 연다.</a:t>
+            </a:r>
+          </a:p>
+        </p:txBody>
+      </p:sp>
+      <p:sp>
+        <p:nvSpPr>
+          <p:cNvPr id="6" name="TextBox 5"/>
+          <p:cNvSpPr txBox="1"/>
+          <p:nvPr/>
+        </p:nvSpPr>
+        <p:spPr>
+          <a:xfrm>
+            <a:off x="457200" y="6400800"/>
+            <a:ext cx="3657600" cy="320040"/>
+          </a:xfrm>
+          <a:prstGeom prst="rect">
+            <a:avLst/>
+          </a:prstGeom>
+          <a:noFill/>
+        </p:spPr>
+        <p:txBody>
+          <a:bodyPr wrap="square" lIns="45720" rIns="45720" anchor="t">
+            <a:spAutoFit/>
+          </a:bodyPr>
+          <a:lstStyle/>
+          <a:p>
+            <a:pPr algn="l"/>
+            <a:r>
+              <a:rPr sz="1000" b="0">
+                <a:solidFill>
+                  <a:srgbClr val="000000"/>
+                </a:solidFill>
+                <a:latin typeface="맑은 고딕"/>
+              </a:rPr>
+              <a:t>LG 화학 1동 ECS  |  화면설계서</a:t>
+            </a:r>
+          </a:p>
+        </p:txBody>
+      </p:sp>
+      <p:sp>
+        <p:nvSpPr>
+          <p:cNvPr id="7" name="TextBox 6"/>
+          <p:cNvSpPr txBox="1"/>
+          <p:nvPr/>
+        </p:nvSpPr>
+        <p:spPr>
+          <a:xfrm>
+            <a:off x="11155680" y="6400800"/>
+            <a:ext cx="731520" cy="320040"/>
+          </a:xfrm>
+          <a:prstGeom prst="rect">
+            <a:avLst/>
+          </a:prstGeom>
+          <a:noFill/>
+        </p:spPr>
+        <p:txBody>
+          <a:bodyPr wrap="square" lIns="45720" rIns="45720" anchor="t">
+            <a:spAutoFit/>
+          </a:bodyPr>
+          <a:lstStyle/>
+          <a:p>
+            <a:pPr algn="r"/>
+            <a:r>
+              <a:rPr sz="1000" b="0">
+                <a:solidFill>
+                  <a:srgbClr val="000000"/>
+                </a:solidFill>
+                <a:latin typeface="맑은 고딕"/>
+              </a:rPr>
+              <a:t>22</a:t>
+            </a:r>
+          </a:p>
+        </p:txBody>
+      </p:sp>
       <p:pic>
         <p:nvPicPr>
-          <p:cNvPr id="4" name="Picture 3" descr="sc4_0.png"/>
+          <p:cNvPr id="8" name="Picture 7" descr="sc4_0.png"/>
           <p:cNvPicPr>
             <a:picLocks noChangeAspect="1"/>
           </p:cNvPicPr>
           <p:nvPr/>
         </p:nvPicPr>
         <p:blipFill>
-          <a:blip r:embed="rId2"/>
+          <a:blip r:embed="rId3"/>
           <a:stretch>
             <a:fillRect/>
           </a:stretch>
@@ -8902,220 +9109,13 @@
         <p:spPr>
           <a:xfrm>
             <a:off x="2405492" y="1280160"/>
-            <a:ext cx="3967255" cy="4846320"/>
+            <a:ext cx="3967255" cy="4846319"/>
           </a:xfrm>
           <a:prstGeom prst="rect">
             <a:avLst/>
           </a:prstGeom>
         </p:spPr>
       </p:pic>
-      <p:sp>
-        <p:nvSpPr>
-          <p:cNvPr id="5" name="TextBox 4"/>
-          <p:cNvSpPr txBox="1"/>
-          <p:nvPr/>
-        </p:nvSpPr>
-        <p:spPr>
-          <a:xfrm>
-            <a:off x="8503920" y="1188720"/>
-            <a:ext cx="3291840" cy="5029200"/>
-          </a:xfrm>
-          <a:prstGeom prst="rect">
-            <a:avLst/>
-          </a:prstGeom>
-          <a:noFill/>
-        </p:spPr>
-        <p:txBody>
-          <a:bodyPr wrap="square" lIns="45720" rIns="45720" anchor="t">
-            <a:spAutoFit/>
-          </a:bodyPr>
-          <a:lstStyle/>
-          <a:p>
-            <a:pPr algn="l"/>
-            <a:r>
-              <a:rPr sz="1300" b="1">
-                <a:solidFill>
-                  <a:srgbClr val="000000"/>
-                </a:solidFill>
-                <a:latin typeface="맑은 고딕"/>
-              </a:rPr>
-              <a:t>■ 메뉴 Path</a:t>
-            </a:r>
-          </a:p>
-          <a:p>
-            <a:pPr algn="l"/>
-            <a:r>
-              <a:rPr sz="1100" b="0">
-                <a:solidFill>
-                  <a:srgbClr val="000000"/>
-                </a:solidFill>
-                <a:latin typeface="맑은 고딕"/>
-              </a:rPr>
-              <a:t>메인 화면에서 크레인(랙 열 번호) 클릭</a:t>
-            </a:r>
-          </a:p>
-          <a:p>
-            <a:pPr algn="l"/>
-            <a:endParaRPr sz="1100" b="0">
-              <a:solidFill>
-                <a:srgbClr val="595959"/>
-              </a:solidFill>
-              <a:latin typeface="맑은 고딕"/>
-            </a:endParaRPr>
-          </a:p>
-          <a:p>
-            <a:pPr algn="l"/>
-            <a:r>
-              <a:rPr sz="1300" b="1">
-                <a:solidFill>
-                  <a:srgbClr val="000000"/>
-                </a:solidFill>
-                <a:latin typeface="맑은 고딕"/>
-              </a:rPr>
-              <a:t>■ 프로그램 개요</a:t>
-            </a:r>
-          </a:p>
-          <a:p>
-            <a:pPr algn="l"/>
-            <a:r>
-              <a:rPr sz="1100" b="0">
-                <a:solidFill>
-                  <a:srgbClr val="000000"/>
-                </a:solidFill>
-                <a:latin typeface="맑은 고딕"/>
-              </a:rPr>
-              <a:t>크레인 상태·차상 화물·좌표·에러와 작업 상태를 본다. 명령은 지시 재전송 / 삭제 / 강제완료 / 수동지시.</a:t>
-            </a:r>
-          </a:p>
-          <a:p>
-            <a:pPr algn="l"/>
-            <a:endParaRPr sz="1100" b="0">
-              <a:solidFill>
-                <a:srgbClr val="595959"/>
-              </a:solidFill>
-              <a:latin typeface="맑은 고딕"/>
-            </a:endParaRPr>
-          </a:p>
-          <a:p>
-            <a:pPr algn="l"/>
-            <a:r>
-              <a:rPr sz="1300" b="1">
-                <a:solidFill>
-                  <a:srgbClr val="000000"/>
-                </a:solidFill>
-                <a:latin typeface="맑은 고딕"/>
-              </a:rPr>
-              <a:t>■ 특기사항</a:t>
-            </a:r>
-          </a:p>
-          <a:p>
-            <a:pPr algn="l"/>
-            <a:r>
-              <a:rPr sz="1000" b="0">
-                <a:solidFill>
-                  <a:srgbClr val="000000"/>
-                </a:solidFill>
-                <a:latin typeface="맑은 고딕"/>
-              </a:rPr>
-              <a:t>· 작업상태는 두 열(왼쪽 작업번호·구분·상태·적재용기·제품정보, 오른쪽 출발지·출발위치·도착지·도착위치).</a:t>
-            </a:r>
-          </a:p>
-          <a:p>
-            <a:pPr algn="l"/>
-            <a:r>
-              <a:rPr sz="1000" b="0">
-                <a:solidFill>
-                  <a:srgbClr val="000000"/>
-                </a:solidFill>
-                <a:latin typeface="맑은 고딕"/>
-              </a:rPr>
-              <a:t>· [지시 삭제] 는 설비에 남은 지시(OD)와 요청 플래그를 함께 비운다.</a:t>
-            </a:r>
-          </a:p>
-          <a:p>
-            <a:pPr algn="l"/>
-            <a:r>
-              <a:rPr sz="1000" b="0">
-                <a:solidFill>
-                  <a:srgbClr val="000000"/>
-                </a:solidFill>
-                <a:latin typeface="맑은 고딕"/>
-              </a:rPr>
-              <a:t>· [수동지시] 는 MANUAL &gt; 크레인 창을 연다.</a:t>
-            </a:r>
-          </a:p>
-        </p:txBody>
-      </p:sp>
-      <p:sp>
-        <p:nvSpPr>
-          <p:cNvPr id="6" name="TextBox 5"/>
-          <p:cNvSpPr txBox="1"/>
-          <p:nvPr/>
-        </p:nvSpPr>
-        <p:spPr>
-          <a:xfrm>
-            <a:off x="457200" y="6400800"/>
-            <a:ext cx="3657600" cy="320040"/>
-          </a:xfrm>
-          <a:prstGeom prst="rect">
-            <a:avLst/>
-          </a:prstGeom>
-          <a:noFill/>
-        </p:spPr>
-        <p:txBody>
-          <a:bodyPr wrap="square" lIns="45720" rIns="45720" anchor="t">
-            <a:spAutoFit/>
-          </a:bodyPr>
-          <a:lstStyle/>
-          <a:p>
-            <a:pPr algn="l"/>
-            <a:r>
-              <a:rPr sz="1000" b="0">
-                <a:solidFill>
-                  <a:srgbClr val="000000"/>
-                </a:solidFill>
-                <a:latin typeface="맑은 고딕"/>
-              </a:rPr>
-              <a:t>LG 화학 1동 ECS  |  화면설계서</a:t>
-            </a:r>
-          </a:p>
-        </p:txBody>
-      </p:sp>
-      <p:sp>
-        <p:nvSpPr>
-          <p:cNvPr id="7" name="TextBox 6"/>
-          <p:cNvSpPr txBox="1"/>
-          <p:nvPr/>
-        </p:nvSpPr>
-        <p:spPr>
-          <a:xfrm>
-            <a:off x="11155680" y="6400800"/>
-            <a:ext cx="731520" cy="320040"/>
-          </a:xfrm>
-          <a:prstGeom prst="rect">
-            <a:avLst/>
-          </a:prstGeom>
-          <a:noFill/>
-        </p:spPr>
-        <p:txBody>
-          <a:bodyPr wrap="square" lIns="45720" rIns="45720" anchor="t">
-            <a:spAutoFit/>
-          </a:bodyPr>
-          <a:lstStyle/>
-          <a:p>
-            <a:pPr algn="r"/>
-            <a:r>
-              <a:rPr sz="1000" b="0">
-                <a:solidFill>
-                  <a:srgbClr val="000000"/>
-                </a:solidFill>
-                <a:latin typeface="맑은 고딕"/>
-              </a:rPr>
-              <a:t>22</a:t>
-            </a:r>
-          </a:p>
-        </p:txBody>
-      </p:sp>
     </p:spTree>
   </p:cSld>
   <p:clrMapOvr>
@@ -9222,16 +9222,199 @@
           </a:p>
         </p:txBody>
       </p:sp>
+      <p:sp>
+        <p:nvSpPr>
+          <p:cNvPr id="5" name="TextBox 4"/>
+          <p:cNvSpPr txBox="1"/>
+          <p:nvPr/>
+        </p:nvSpPr>
+        <p:spPr>
+          <a:xfrm>
+            <a:off x="8503920" y="1188720"/>
+            <a:ext cx="3291840" cy="5029200"/>
+          </a:xfrm>
+          <a:prstGeom prst="rect">
+            <a:avLst/>
+          </a:prstGeom>
+          <a:noFill/>
+        </p:spPr>
+        <p:txBody>
+          <a:bodyPr wrap="square" lIns="45720" rIns="45720" anchor="t">
+            <a:spAutoFit/>
+          </a:bodyPr>
+          <a:lstStyle/>
+          <a:p>
+            <a:pPr algn="l"/>
+            <a:r>
+              <a:rPr sz="1300" b="1">
+                <a:solidFill>
+                  <a:srgbClr val="000000"/>
+                </a:solidFill>
+                <a:latin typeface="맑은 고딕"/>
+              </a:rPr>
+              <a:t>■ 메뉴 Path</a:t>
+            </a:r>
+          </a:p>
+          <a:p>
+            <a:pPr algn="l"/>
+            <a:r>
+              <a:rPr sz="1100" b="0">
+                <a:solidFill>
+                  <a:srgbClr val="000000"/>
+                </a:solidFill>
+                <a:latin typeface="맑은 고딕"/>
+              </a:rPr>
+              <a:t>메인 화면에서 RGV 클릭</a:t>
+            </a:r>
+          </a:p>
+          <a:p>
+            <a:pPr algn="l"/>
+            <a:endParaRPr sz="1100" b="0">
+              <a:solidFill>
+                <a:srgbClr val="595959"/>
+              </a:solidFill>
+              <a:latin typeface="맑은 고딕"/>
+            </a:endParaRPr>
+          </a:p>
+          <a:p>
+            <a:pPr algn="l"/>
+            <a:r>
+              <a:rPr sz="1300" b="1">
+                <a:solidFill>
+                  <a:srgbClr val="000000"/>
+                </a:solidFill>
+                <a:latin typeface="맑은 고딕"/>
+              </a:rPr>
+              <a:t>■ 프로그램 개요</a:t>
+            </a:r>
+          </a:p>
+          <a:p>
+            <a:pPr algn="l"/>
+            <a:r>
+              <a:rPr sz="1100" b="0">
+                <a:solidFill>
+                  <a:srgbClr val="000000"/>
+                </a:solidFill>
+                <a:latin typeface="맑은 고딕"/>
+              </a:rPr>
+              <a:t>RGV 상태와 작업 상태를 본다. 명령은 지시 재전송 / 삭제 / 강제완료 / 수동지시, 명령 그룹 아래에 일시정지(상태 표시 + 버튼).</a:t>
+            </a:r>
+          </a:p>
+          <a:p>
+            <a:pPr algn="l"/>
+            <a:endParaRPr sz="1100" b="0">
+              <a:solidFill>
+                <a:srgbClr val="595959"/>
+              </a:solidFill>
+              <a:latin typeface="맑은 고딕"/>
+            </a:endParaRPr>
+          </a:p>
+          <a:p>
+            <a:pPr algn="l"/>
+            <a:r>
+              <a:rPr sz="1300" b="1">
+                <a:solidFill>
+                  <a:srgbClr val="000000"/>
+                </a:solidFill>
+                <a:latin typeface="맑은 고딕"/>
+              </a:rPr>
+              <a:t>■ 특기사항</a:t>
+            </a:r>
+          </a:p>
+          <a:p>
+            <a:pPr algn="l"/>
+            <a:r>
+              <a:rPr sz="1000" b="0">
+                <a:solidFill>
+                  <a:srgbClr val="000000"/>
+                </a:solidFill>
+                <a:latin typeface="맑은 고딕"/>
+              </a:rPr>
+              <a:t>· RGV 가 지시를 받지 않을 때(요청 플래그 잔류) [지시 삭제] 로 풀 수 있다.</a:t>
+            </a:r>
+          </a:p>
+        </p:txBody>
+      </p:sp>
+      <p:sp>
+        <p:nvSpPr>
+          <p:cNvPr id="6" name="TextBox 5"/>
+          <p:cNvSpPr txBox="1"/>
+          <p:nvPr/>
+        </p:nvSpPr>
+        <p:spPr>
+          <a:xfrm>
+            <a:off x="457200" y="6400800"/>
+            <a:ext cx="3657600" cy="320040"/>
+          </a:xfrm>
+          <a:prstGeom prst="rect">
+            <a:avLst/>
+          </a:prstGeom>
+          <a:noFill/>
+        </p:spPr>
+        <p:txBody>
+          <a:bodyPr wrap="square" lIns="45720" rIns="45720" anchor="t">
+            <a:spAutoFit/>
+          </a:bodyPr>
+          <a:lstStyle/>
+          <a:p>
+            <a:pPr algn="l"/>
+            <a:r>
+              <a:rPr sz="1000" b="0">
+                <a:solidFill>
+                  <a:srgbClr val="000000"/>
+                </a:solidFill>
+                <a:latin typeface="맑은 고딕"/>
+              </a:rPr>
+              <a:t>LG 화학 1동 ECS  |  화면설계서</a:t>
+            </a:r>
+          </a:p>
+        </p:txBody>
+      </p:sp>
+      <p:sp>
+        <p:nvSpPr>
+          <p:cNvPr id="7" name="TextBox 6"/>
+          <p:cNvSpPr txBox="1"/>
+          <p:nvPr/>
+        </p:nvSpPr>
+        <p:spPr>
+          <a:xfrm>
+            <a:off x="11155680" y="6400800"/>
+            <a:ext cx="731520" cy="320040"/>
+          </a:xfrm>
+          <a:prstGeom prst="rect">
+            <a:avLst/>
+          </a:prstGeom>
+          <a:noFill/>
+        </p:spPr>
+        <p:txBody>
+          <a:bodyPr wrap="square" lIns="45720" rIns="45720" anchor="t">
+            <a:spAutoFit/>
+          </a:bodyPr>
+          <a:lstStyle/>
+          <a:p>
+            <a:pPr algn="r"/>
+            <a:r>
+              <a:rPr sz="1000" b="0">
+                <a:solidFill>
+                  <a:srgbClr val="000000"/>
+                </a:solidFill>
+                <a:latin typeface="맑은 고딕"/>
+              </a:rPr>
+              <a:t>23</a:t>
+            </a:r>
+          </a:p>
+        </p:txBody>
+      </p:sp>
       <p:pic>
         <p:nvPicPr>
-          <p:cNvPr id="4" name="Picture 3" descr="rtv_0.png"/>
+          <p:cNvPr id="8" name="Picture 7" descr="rtv_0.png"/>
           <p:cNvPicPr>
             <a:picLocks noChangeAspect="1"/>
           </p:cNvPicPr>
           <p:nvPr/>
         </p:nvPicPr>
         <p:blipFill>
-          <a:blip r:embed="rId2"/>
+          <a:blip r:embed="rId3"/>
           <a:stretch>
             <a:fillRect/>
           </a:stretch>
@@ -9239,196 +9422,13 @@
         <p:spPr>
           <a:xfrm>
             <a:off x="2183372" y="1280160"/>
-            <a:ext cx="4411495" cy="4846320"/>
+            <a:ext cx="4411495" cy="4846319"/>
           </a:xfrm>
           <a:prstGeom prst="rect">
             <a:avLst/>
           </a:prstGeom>
         </p:spPr>
       </p:pic>
-      <p:sp>
-        <p:nvSpPr>
-          <p:cNvPr id="5" name="TextBox 4"/>
-          <p:cNvSpPr txBox="1"/>
-          <p:nvPr/>
-        </p:nvSpPr>
-        <p:spPr>
-          <a:xfrm>
-            <a:off x="8503920" y="1188720"/>
-            <a:ext cx="3291840" cy="5029200"/>
-          </a:xfrm>
-          <a:prstGeom prst="rect">
-            <a:avLst/>
-          </a:prstGeom>
-          <a:noFill/>
-        </p:spPr>
-        <p:txBody>
-          <a:bodyPr wrap="square" lIns="45720" rIns="45720" anchor="t">
-            <a:spAutoFit/>
-          </a:bodyPr>
-          <a:lstStyle/>
-          <a:p>
-            <a:pPr algn="l"/>
-            <a:r>
-              <a:rPr sz="1300" b="1">
-                <a:solidFill>
-                  <a:srgbClr val="000000"/>
-                </a:solidFill>
-                <a:latin typeface="맑은 고딕"/>
-              </a:rPr>
-              <a:t>■ 메뉴 Path</a:t>
-            </a:r>
-          </a:p>
-          <a:p>
-            <a:pPr algn="l"/>
-            <a:r>
-              <a:rPr sz="1100" b="0">
-                <a:solidFill>
-                  <a:srgbClr val="000000"/>
-                </a:solidFill>
-                <a:latin typeface="맑은 고딕"/>
-              </a:rPr>
-              <a:t>메인 화면에서 RGV 클릭</a:t>
-            </a:r>
-          </a:p>
-          <a:p>
-            <a:pPr algn="l"/>
-            <a:endParaRPr sz="1100" b="0">
-              <a:solidFill>
-                <a:srgbClr val="595959"/>
-              </a:solidFill>
-              <a:latin typeface="맑은 고딕"/>
-            </a:endParaRPr>
-          </a:p>
-          <a:p>
-            <a:pPr algn="l"/>
-            <a:r>
-              <a:rPr sz="1300" b="1">
-                <a:solidFill>
-                  <a:srgbClr val="000000"/>
-                </a:solidFill>
-                <a:latin typeface="맑은 고딕"/>
-              </a:rPr>
-              <a:t>■ 프로그램 개요</a:t>
-            </a:r>
-          </a:p>
-          <a:p>
-            <a:pPr algn="l"/>
-            <a:r>
-              <a:rPr sz="1100" b="0">
-                <a:solidFill>
-                  <a:srgbClr val="000000"/>
-                </a:solidFill>
-                <a:latin typeface="맑은 고딕"/>
-              </a:rPr>
-              <a:t>RGV 상태와 작업 상태를 본다. 명령은 지시 재전송 / 삭제 / 강제완료 / 수동지시, 명령 그룹 아래에 일시정지(상태 표시 + 버튼).</a:t>
-            </a:r>
-          </a:p>
-          <a:p>
-            <a:pPr algn="l"/>
-            <a:endParaRPr sz="1100" b="0">
-              <a:solidFill>
-                <a:srgbClr val="595959"/>
-              </a:solidFill>
-              <a:latin typeface="맑은 고딕"/>
-            </a:endParaRPr>
-          </a:p>
-          <a:p>
-            <a:pPr algn="l"/>
-            <a:r>
-              <a:rPr sz="1300" b="1">
-                <a:solidFill>
-                  <a:srgbClr val="000000"/>
-                </a:solidFill>
-                <a:latin typeface="맑은 고딕"/>
-              </a:rPr>
-              <a:t>■ 특기사항</a:t>
-            </a:r>
-          </a:p>
-          <a:p>
-            <a:pPr algn="l"/>
-            <a:r>
-              <a:rPr sz="1000" b="0">
-                <a:solidFill>
-                  <a:srgbClr val="000000"/>
-                </a:solidFill>
-                <a:latin typeface="맑은 고딕"/>
-              </a:rPr>
-              <a:t>· RGV 가 지시를 받지 않을 때(요청 플래그 잔류) [지시 삭제] 로 풀 수 있다.</a:t>
-            </a:r>
-          </a:p>
-        </p:txBody>
-      </p:sp>
-      <p:sp>
-        <p:nvSpPr>
-          <p:cNvPr id="6" name="TextBox 5"/>
-          <p:cNvSpPr txBox="1"/>
-          <p:nvPr/>
-        </p:nvSpPr>
-        <p:spPr>
-          <a:xfrm>
-            <a:off x="457200" y="6400800"/>
-            <a:ext cx="3657600" cy="320040"/>
-          </a:xfrm>
-          <a:prstGeom prst="rect">
-            <a:avLst/>
-          </a:prstGeom>
-          <a:noFill/>
-        </p:spPr>
-        <p:txBody>
-          <a:bodyPr wrap="square" lIns="45720" rIns="45720" anchor="t">
-            <a:spAutoFit/>
-          </a:bodyPr>
-          <a:lstStyle/>
-          <a:p>
-            <a:pPr algn="l"/>
-            <a:r>
-              <a:rPr sz="1000" b="0">
-                <a:solidFill>
-                  <a:srgbClr val="000000"/>
-                </a:solidFill>
-                <a:latin typeface="맑은 고딕"/>
-              </a:rPr>
-              <a:t>LG 화학 1동 ECS  |  화면설계서</a:t>
-            </a:r>
-          </a:p>
-        </p:txBody>
-      </p:sp>
-      <p:sp>
-        <p:nvSpPr>
-          <p:cNvPr id="7" name="TextBox 6"/>
-          <p:cNvSpPr txBox="1"/>
-          <p:nvPr/>
-        </p:nvSpPr>
-        <p:spPr>
-          <a:xfrm>
-            <a:off x="11155680" y="6400800"/>
-            <a:ext cx="731520" cy="320040"/>
-          </a:xfrm>
-          <a:prstGeom prst="rect">
-            <a:avLst/>
-          </a:prstGeom>
-          <a:noFill/>
-        </p:spPr>
-        <p:txBody>
-          <a:bodyPr wrap="square" lIns="45720" rIns="45720" anchor="t">
-            <a:spAutoFit/>
-          </a:bodyPr>
-          <a:lstStyle/>
-          <a:p>
-            <a:pPr algn="r"/>
-            <a:r>
-              <a:rPr sz="1000" b="0">
-                <a:solidFill>
-                  <a:srgbClr val="000000"/>
-                </a:solidFill>
-                <a:latin typeface="맑은 고딕"/>
-              </a:rPr>
-              <a:t>23</a:t>
-            </a:r>
-          </a:p>
-        </p:txBody>
-      </p:sp>
     </p:spTree>
   </p:cSld>
   <p:clrMapOvr>
